--- a/その他/ゲーム展示会/学生ゲーム展示会.pptx
+++ b/その他/ゲーム展示会/学生ゲーム展示会.pptx
@@ -358,7 +358,7 @@
           <a:p>
             <a:fld id="{B666B9C9-A3AA-462B-AA08-59196B1B6C77}" type="datetimeFigureOut">
               <a:rPr kumimoji="1" lang="ja-JP" altLang="en-US" smtClean="0"/>
-              <a:t>2026/8/25</a:t>
+              <a:t>2026/9/14</a:t>
             </a:fld>
             <a:endParaRPr kumimoji="1" lang="ja-JP" altLang="en-US"/>
           </a:p>
@@ -598,7 +598,7 @@
           <a:p>
             <a:fld id="{B666B9C9-A3AA-462B-AA08-59196B1B6C77}" type="datetimeFigureOut">
               <a:rPr kumimoji="1" lang="ja-JP" altLang="en-US" smtClean="0"/>
-              <a:t>2026/8/25</a:t>
+              <a:t>2026/9/14</a:t>
             </a:fld>
             <a:endParaRPr kumimoji="1" lang="ja-JP" altLang="en-US"/>
           </a:p>
@@ -886,7 +886,7 @@
           <a:p>
             <a:fld id="{B666B9C9-A3AA-462B-AA08-59196B1B6C77}" type="datetimeFigureOut">
               <a:rPr kumimoji="1" lang="ja-JP" altLang="en-US" smtClean="0"/>
-              <a:t>2026/8/25</a:t>
+              <a:t>2026/9/14</a:t>
             </a:fld>
             <a:endParaRPr kumimoji="1" lang="ja-JP" altLang="en-US"/>
           </a:p>
@@ -1088,7 +1088,7 @@
           <a:p>
             <a:fld id="{B666B9C9-A3AA-462B-AA08-59196B1B6C77}" type="datetimeFigureOut">
               <a:rPr kumimoji="1" lang="ja-JP" altLang="en-US" smtClean="0"/>
-              <a:t>2026/8/25</a:t>
+              <a:t>2026/9/14</a:t>
             </a:fld>
             <a:endParaRPr kumimoji="1" lang="ja-JP" altLang="en-US"/>
           </a:p>
@@ -1431,7 +1431,7 @@
           <a:p>
             <a:fld id="{B666B9C9-A3AA-462B-AA08-59196B1B6C77}" type="datetimeFigureOut">
               <a:rPr kumimoji="1" lang="ja-JP" altLang="en-US" smtClean="0"/>
-              <a:t>2026/8/25</a:t>
+              <a:t>2026/9/14</a:t>
             </a:fld>
             <a:endParaRPr kumimoji="1" lang="ja-JP" altLang="en-US"/>
           </a:p>
@@ -1770,7 +1770,7 @@
           <a:p>
             <a:fld id="{B666B9C9-A3AA-462B-AA08-59196B1B6C77}" type="datetimeFigureOut">
               <a:rPr kumimoji="1" lang="ja-JP" altLang="en-US" smtClean="0"/>
-              <a:t>2026/8/25</a:t>
+              <a:t>2026/9/14</a:t>
             </a:fld>
             <a:endParaRPr kumimoji="1" lang="ja-JP" altLang="en-US"/>
           </a:p>
@@ -2213,7 +2213,7 @@
           <a:p>
             <a:fld id="{B666B9C9-A3AA-462B-AA08-59196B1B6C77}" type="datetimeFigureOut">
               <a:rPr kumimoji="1" lang="ja-JP" altLang="en-US" smtClean="0"/>
-              <a:t>2026/8/25</a:t>
+              <a:t>2026/9/14</a:t>
             </a:fld>
             <a:endParaRPr kumimoji="1" lang="ja-JP" altLang="en-US"/>
           </a:p>
@@ -2331,7 +2331,7 @@
           <a:p>
             <a:fld id="{B666B9C9-A3AA-462B-AA08-59196B1B6C77}" type="datetimeFigureOut">
               <a:rPr kumimoji="1" lang="ja-JP" altLang="en-US" smtClean="0"/>
-              <a:t>2026/8/25</a:t>
+              <a:t>2026/9/14</a:t>
             </a:fld>
             <a:endParaRPr kumimoji="1" lang="ja-JP" altLang="en-US"/>
           </a:p>
@@ -2502,7 +2502,7 @@
           <a:p>
             <a:fld id="{B666B9C9-A3AA-462B-AA08-59196B1B6C77}" type="datetimeFigureOut">
               <a:rPr kumimoji="1" lang="ja-JP" altLang="en-US" smtClean="0"/>
-              <a:t>2026/8/25</a:t>
+              <a:t>2026/9/14</a:t>
             </a:fld>
             <a:endParaRPr kumimoji="1" lang="ja-JP" altLang="en-US"/>
           </a:p>
@@ -2888,7 +2888,7 @@
           <a:p>
             <a:fld id="{B666B9C9-A3AA-462B-AA08-59196B1B6C77}" type="datetimeFigureOut">
               <a:rPr kumimoji="1" lang="ja-JP" altLang="en-US" smtClean="0"/>
-              <a:t>2026/8/25</a:t>
+              <a:t>2026/9/14</a:t>
             </a:fld>
             <a:endParaRPr kumimoji="1" lang="ja-JP" altLang="en-US"/>
           </a:p>
@@ -3265,7 +3265,7 @@
           <a:p>
             <a:fld id="{B666B9C9-A3AA-462B-AA08-59196B1B6C77}" type="datetimeFigureOut">
               <a:rPr kumimoji="1" lang="ja-JP" altLang="en-US" smtClean="0"/>
-              <a:t>2026/8/25</a:t>
+              <a:t>2026/9/14</a:t>
             </a:fld>
             <a:endParaRPr kumimoji="1" lang="ja-JP" altLang="en-US"/>
           </a:p>
@@ -3584,7 +3584,7 @@
           <a:p>
             <a:fld id="{B666B9C9-A3AA-462B-AA08-59196B1B6C77}" type="datetimeFigureOut">
               <a:rPr kumimoji="1" lang="ja-JP" altLang="en-US" smtClean="0"/>
-              <a:t>2026/8/25</a:t>
+              <a:t>2026/9/14</a:t>
             </a:fld>
             <a:endParaRPr kumimoji="1" lang="ja-JP" altLang="en-US"/>
           </a:p>
@@ -4605,7 +4605,7 @@
                   <a:srgbClr val="FF0000"/>
                 </a:solidFill>
               </a:rPr>
-              <a:t>平日でも休日でも来られやすい</a:t>
+              <a:t>外部の方が平日でも休日でも来られやすい</a:t>
             </a:r>
             <a:r>
               <a:rPr kumimoji="1" lang="ja-JP" altLang="en-US" sz="2800" b="1" dirty="0"/>
